--- a/assets/pptx/catalog-653.pptx
+++ b/assets/pptx/catalog-653.pptx
@@ -3349,7 +3349,7 @@
                 <a:ea typeface="Ebrima"/>
                 <a:cs typeface="Ebrima"/>
               </a:rPr>
-              <a:t>(2x)</a:t>
+              <a:t>2x</a:t>
             </a:r>
           </a:p>
         </p:txBody>
@@ -3550,7 +3550,7 @@
                 <a:ea typeface="Ebrima"/>
                 <a:cs typeface="Ebrima"/>
               </a:rPr>
-              <a:t>(4x)</a:t>
+              <a:t>4x</a:t>
             </a:r>
           </a:p>
         </p:txBody>
@@ -3617,7 +3617,7 @@
                 <a:ea typeface="Ebrima"/>
                 <a:cs typeface="Ebrima"/>
               </a:rPr>
-              <a:t>አዝ ጌታ በአንተ ነው መኖሬ (3x) ቢረዳልኝ ልቤ ቢረዳልኝ ልቤ በአንተ ነው መኖሬ (2x)</a:t>
+              <a:t>አዝ ጌታ በአንተ ነው መኖሬ 3x ቢረዳልኝ ልቤ ቢረዳልኝ ልቤ በአንተ ነው መኖሬ 2x</a:t>
             </a:r>
           </a:p>
         </p:txBody>
@@ -3818,7 +3818,7 @@
                 <a:ea typeface="Ebrima"/>
                 <a:cs typeface="Ebrima"/>
               </a:rPr>
-              <a:t>(2x)</a:t>
+              <a:t>2x</a:t>
             </a:r>
           </a:p>
         </p:txBody>
@@ -3952,7 +3952,7 @@
                 <a:ea typeface="Ebrima"/>
                 <a:cs typeface="Ebrima"/>
               </a:rPr>
-              <a:t>አዝ ጌታ በአንተ ነው መኖሬ (3x) ቢረዳልኝ ልቤ ቢረዳልኝ ልቤ በአንተ ነው መኖሬ (2x)</a:t>
+              <a:t>አዝ ጌታ በአንተ ነው መኖሬ 3x ቢረዳልኝ ልቤ ቢረዳልኝ ልቤ በአንተ ነው መኖሬ 2x</a:t>
             </a:r>
           </a:p>
         </p:txBody>
@@ -4086,7 +4086,7 @@
                 <a:ea typeface="Ebrima"/>
                 <a:cs typeface="Ebrima"/>
               </a:rPr>
-              <a:t>(2x)</a:t>
+              <a:t>2x</a:t>
             </a:r>
           </a:p>
         </p:txBody>
@@ -4287,7 +4287,7 @@
                 <a:ea typeface="Ebrima"/>
                 <a:cs typeface="Ebrima"/>
               </a:rPr>
-              <a:t>(2x)</a:t>
+              <a:t>2x</a:t>
             </a:r>
           </a:p>
         </p:txBody>
@@ -4488,7 +4488,7 @@
                 <a:ea typeface="Ebrima"/>
                 <a:cs typeface="Ebrima"/>
               </a:rPr>
-              <a:t>(4x)</a:t>
+              <a:t>4x</a:t>
             </a:r>
           </a:p>
         </p:txBody>
@@ -4555,7 +4555,7 @@
                 <a:ea typeface="Ebrima"/>
                 <a:cs typeface="Ebrima"/>
               </a:rPr>
-              <a:t>አዝ ጌታ በአንተ ነው መኖሬ (3x) ቢረዳልኝ ልቤ ቢረዳልኝ ልቤ በአንተ ነው መኖሬ (2x)</a:t>
+              <a:t>አዝ ጌታ በአንተ ነው መኖሬ 3x ቢረዳልኝ ልቤ ቢረዳልኝ ልቤ በአንተ ነው መኖሬ 2x</a:t>
             </a:r>
           </a:p>
         </p:txBody>
@@ -4823,7 +4823,7 @@
                 <a:ea typeface="Ebrima"/>
                 <a:cs typeface="Ebrima"/>
               </a:rPr>
-              <a:t>(2x)</a:t>
+              <a:t>2x</a:t>
             </a:r>
           </a:p>
         </p:txBody>
@@ -5024,7 +5024,7 @@
                 <a:ea typeface="Ebrima"/>
                 <a:cs typeface="Ebrima"/>
               </a:rPr>
-              <a:t>(2x)</a:t>
+              <a:t>2x</a:t>
             </a:r>
           </a:p>
         </p:txBody>
@@ -5225,7 +5225,7 @@
                 <a:ea typeface="Ebrima"/>
                 <a:cs typeface="Ebrima"/>
               </a:rPr>
-              <a:t>(2x)</a:t>
+              <a:t>2x</a:t>
             </a:r>
           </a:p>
         </p:txBody>
@@ -5493,7 +5493,7 @@
                 <a:ea typeface="Ebrima"/>
                 <a:cs typeface="Ebrima"/>
               </a:rPr>
-              <a:t>(2x)</a:t>
+              <a:t>2x</a:t>
             </a:r>
           </a:p>
         </p:txBody>
@@ -5627,7 +5627,7 @@
                 <a:ea typeface="Ebrima"/>
                 <a:cs typeface="Ebrima"/>
               </a:rPr>
-              <a:t>(2x)</a:t>
+              <a:t>2x</a:t>
             </a:r>
           </a:p>
         </p:txBody>
@@ -5694,7 +5694,7 @@
                 <a:ea typeface="Ebrima"/>
                 <a:cs typeface="Ebrima"/>
               </a:rPr>
-              <a:t>አዝ ጌታ በአንተ ነው መኖሬ (3x) ቢረዳልኝ ልቤ ቢረዳልኝ ልቤ በአንተ ነው መኖሬ (4x)</a:t>
+              <a:t>አዝ ጌታ በአንተ ነው መኖሬ 3x ቢረዳልኝ ልቤ ቢረዳልኝ ልቤ በአንተ ነው መኖሬ 4x</a:t>
             </a:r>
           </a:p>
         </p:txBody>
@@ -5761,7 +5761,7 @@
                 <a:ea typeface="Ebrima"/>
                 <a:cs typeface="Ebrima"/>
               </a:rPr>
-              <a:t>(2x)</a:t>
+              <a:t>2x</a:t>
             </a:r>
           </a:p>
         </p:txBody>
@@ -5962,7 +5962,7 @@
                 <a:ea typeface="Ebrima"/>
                 <a:cs typeface="Ebrima"/>
               </a:rPr>
-              <a:t>(2x)</a:t>
+              <a:t>2x</a:t>
             </a:r>
           </a:p>
         </p:txBody>
